--- a/AI-media-coding/인공지능과미디어_2026.pptx
+++ b/AI-media-coding/인공지능과미디어_2026.pptx
@@ -9882,11 +9882,11 @@
               <a:buNone/>
             </a:pPr>
             <a:r>
-              <a:rPr lang="en-US" sz="930" b="1" dirty="0"/>
+              <a:rPr lang="en-US" sz="900" b="1" dirty="0"/>
               <a:t>📝 텍스트: </a:t>
             </a:r>
             <a:r>
-              <a:rPr lang="en-US" sz="930" dirty="0"/>
+              <a:rPr lang="en-US" sz="900" dirty="0"/>
               <a:t>마케터의 85%가 기사·블로그·SNS 글 작성에 AI 활용</a:t>
             </a:r>
           </a:p>
@@ -9898,21 +9898,20 @@
               <a:buNone/>
             </a:pPr>
             <a:r>
-              <a:rPr lang="en-US" sz="820" dirty="0"/>
+              <a:rPr lang="en-US" sz="900" dirty="0"/>
               <a:t>  (CoSchedule, 2025)</a:t>
             </a:r>
-            <a:endParaRPr lang="en-US" sz="930" dirty="0"/>
-          </a:p>
-          <a:p>
-            <a:pPr marL="0" indent="0">
-              <a:buNone/>
-            </a:pPr>
-            <a:r>
-              <a:rPr lang="en-US" sz="930" b="1" dirty="0"/>
+          </a:p>
+          <a:p>
+            <a:pPr marL="0" indent="0">
+              <a:buNone/>
+            </a:pPr>
+            <a:r>
+              <a:rPr lang="en-US" sz="900" b="1" dirty="0"/>
               <a:t>🖼️ 이미지: </a:t>
             </a:r>
             <a:r>
-              <a:rPr lang="en-US" sz="930" dirty="0"/>
+              <a:rPr lang="en-US" sz="900" dirty="0"/>
               <a:t>소셜미디어 이미지의 약 70%가 Midjourney·DALL-E 등</a:t>
             </a:r>
           </a:p>
@@ -9924,21 +9923,20 @@
               <a:buNone/>
             </a:pPr>
             <a:r>
-              <a:rPr lang="en-US" sz="820" dirty="0"/>
+              <a:rPr lang="en-US" sz="900" dirty="0"/>
               <a:t>  AI 도구로 제작·보정 (SQMagazine, 2025)</a:t>
             </a:r>
-            <a:endParaRPr lang="en-US" sz="930" dirty="0"/>
-          </a:p>
-          <a:p>
-            <a:pPr marL="0" indent="0">
-              <a:buNone/>
-            </a:pPr>
-            <a:r>
-              <a:rPr lang="en-US" sz="930" b="1" dirty="0"/>
+          </a:p>
+          <a:p>
+            <a:pPr marL="0" indent="0">
+              <a:buNone/>
+            </a:pPr>
+            <a:r>
+              <a:rPr lang="en-US" sz="900" b="1" dirty="0"/>
               <a:t>🎬 영상: </a:t>
             </a:r>
             <a:r>
-              <a:rPr lang="en-US" sz="930" dirty="0"/>
+              <a:rPr lang="en-US" sz="900" dirty="0"/>
               <a:t>기업의 90%+가 영상 마케팅 활용, 75%가 AI로 영상 제작</a:t>
             </a:r>
           </a:p>
@@ -9950,21 +9948,20 @@
               <a:buNone/>
             </a:pPr>
             <a:r>
-              <a:rPr lang="en-US" sz="820" dirty="0"/>
+              <a:rPr lang="en-US" sz="900" dirty="0"/>
               <a:t>  (Wyzowl, 2025)</a:t>
             </a:r>
-            <a:endParaRPr lang="en-US" sz="930" dirty="0"/>
-          </a:p>
-          <a:p>
-            <a:pPr marL="0" indent="0">
-              <a:buNone/>
-            </a:pPr>
-            <a:r>
-              <a:rPr lang="en-US" sz="930" b="1" dirty="0"/>
+          </a:p>
+          <a:p>
+            <a:pPr marL="0" indent="0">
+              <a:buNone/>
+            </a:pPr>
+            <a:r>
+              <a:rPr lang="en-US" sz="900" b="1" dirty="0"/>
               <a:t>🎤 음성: </a:t>
             </a:r>
             <a:r>
-              <a:rPr lang="en-US" sz="930" dirty="0"/>
+              <a:rPr lang="en-US" sz="900" dirty="0"/>
               <a:t>팟캐스트 청취자 5.8억 명 돌파. Whisper 등 AI 기반 음성→</a:t>
             </a:r>
           </a:p>
@@ -9976,21 +9973,20 @@
               <a:buNone/>
             </a:pPr>
             <a:r>
-              <a:rPr lang="en-US" sz="820" dirty="0"/>
+              <a:rPr lang="en-US" sz="900" dirty="0"/>
               <a:t>  텍스트 변환·자동 편집이 업계 표준으로 정착 (Statista, 2025)</a:t>
             </a:r>
-            <a:endParaRPr lang="en-US" sz="930" dirty="0"/>
-          </a:p>
-          <a:p>
-            <a:pPr marL="0" indent="0">
-              <a:buNone/>
-            </a:pPr>
-            <a:r>
-              <a:rPr lang="en-US" sz="930" b="1" dirty="0"/>
+          </a:p>
+          <a:p>
+            <a:pPr marL="0" indent="0">
+              <a:buNone/>
+            </a:pPr>
+            <a:r>
+              <a:rPr lang="en-US" sz="900" b="1" dirty="0"/>
               <a:t>📊 데이터: </a:t>
             </a:r>
             <a:r>
-              <a:rPr lang="en-US" sz="930" dirty="0"/>
+              <a:rPr lang="en-US" sz="900" dirty="0"/>
               <a:t>전 세계 조직의 78%가 최소 1개 업무에 AI 도입</a:t>
             </a:r>
           </a:p>
@@ -10002,21 +9998,20 @@
               <a:buNone/>
             </a:pPr>
             <a:r>
-              <a:rPr lang="en-US" sz="820" dirty="0"/>
+              <a:rPr lang="en-US" sz="900" dirty="0"/>
               <a:t>  (Stanford AI Index, 2025)</a:t>
             </a:r>
-            <a:endParaRPr lang="en-US" sz="930" dirty="0"/>
-          </a:p>
-          <a:p>
-            <a:pPr marL="0" indent="0">
-              <a:buNone/>
-            </a:pPr>
-            <a:r>
-              <a:rPr lang="en-US" sz="930" b="1" dirty="0"/>
+          </a:p>
+          <a:p>
+            <a:pPr marL="0" indent="0">
+              <a:buNone/>
+            </a:pPr>
+            <a:r>
+              <a:rPr lang="en-US" sz="900" b="1" dirty="0"/>
               <a:t>📱 플랫폼: </a:t>
             </a:r>
             <a:r>
-              <a:rPr lang="en-US" sz="930" dirty="0"/>
+              <a:rPr lang="en-US" sz="900" dirty="0"/>
               <a:t>유튜브·틱톡·인스타 등 콘텐츠 추천의 80%+가 AI 알고리즘</a:t>
             </a:r>
           </a:p>
@@ -10025,10 +10020,9 @@
               <a:buNone/>
             </a:pPr>
             <a:r>
-              <a:rPr lang="en-US" sz="820" dirty="0"/>
+              <a:rPr lang="en-US" sz="900" dirty="0"/>
               <a:t>  으로 작동 (SQMagazine, 2025)</a:t>
             </a:r>
-            <a:endParaRPr lang="en-US" sz="930" dirty="0"/>
           </a:p>
         </p:txBody>
       </p:sp>
@@ -10143,14 +10137,13 @@
               <a:buNone/>
             </a:pPr>
             <a:r>
-              <a:rPr lang="en-US" sz="950" b="1" dirty="0"/>
+              <a:rPr lang="en-US" sz="900" b="1" dirty="0"/>
               <a:t>저널리즘</a:t>
             </a:r>
             <a:r>
-              <a:rPr lang="en-US" sz="930" dirty="0"/>
+              <a:rPr lang="en-US" sz="900" dirty="0"/>
               <a:t> — 뉴스룸의 87%가 생성형 AI로 취재·편집·배포를</a:t>
             </a:r>
-            <a:endParaRPr lang="en-US" sz="950" dirty="0"/>
           </a:p>
           <a:p>
             <a:pPr marL="0" indent="0">
@@ -10160,10 +10153,9 @@
               <a:buNone/>
             </a:pPr>
             <a:r>
-              <a:rPr lang="en-US" sz="930" dirty="0"/>
+              <a:rPr lang="en-US" sz="900" dirty="0"/>
               <a:t>변화시키는 중. 2026년 에이전틱 AI가 기사 작성부터 배포까지</a:t>
             </a:r>
-            <a:endParaRPr lang="en-US" sz="950" dirty="0"/>
           </a:p>
           <a:p>
             <a:pPr marL="0" indent="0">
@@ -10173,24 +10165,22 @@
               <a:buNone/>
             </a:pPr>
             <a:r>
-              <a:rPr lang="en-US" sz="820" dirty="0"/>
+              <a:rPr lang="en-US" sz="900" dirty="0"/>
               <a:t>워크플로우를 자동화할 전망 (Reuters Institute, 2025~2026)</a:t>
             </a:r>
-            <a:endParaRPr lang="en-US" sz="950" dirty="0"/>
-          </a:p>
-          <a:p>
-            <a:pPr marL="0" indent="0">
-              <a:buNone/>
-            </a:pPr>
-            <a:r>
-              <a:rPr lang="en-US" sz="950" b="1" dirty="0"/>
+          </a:p>
+          <a:p>
+            <a:pPr marL="0" indent="0">
+              <a:buNone/>
+            </a:pPr>
+            <a:r>
+              <a:rPr lang="en-US" sz="900" b="1" dirty="0"/>
               <a:t>콘텐츠 마케팅</a:t>
             </a:r>
             <a:r>
-              <a:rPr lang="en-US" sz="930" dirty="0"/>
+              <a:rPr lang="en-US" sz="900" dirty="0"/>
               <a:t> — AI 콘텐츠 제작 시장이 2033년 $106억 규모로</a:t>
             </a:r>
-            <a:endParaRPr lang="en-US" sz="950" dirty="0"/>
           </a:p>
           <a:p>
             <a:pPr marL="0" indent="0">
@@ -10200,24 +10190,22 @@
               <a:buNone/>
             </a:pPr>
             <a:r>
-              <a:rPr lang="en-US" sz="820" dirty="0"/>
+              <a:rPr lang="en-US" sz="900" dirty="0"/>
               <a:t>성장 전망. 연평균 19.4% 성장 (Grand View Research, 2025)</a:t>
             </a:r>
-            <a:endParaRPr lang="en-US" sz="950" dirty="0"/>
-          </a:p>
-          <a:p>
-            <a:pPr marL="0" indent="0">
-              <a:buNone/>
-            </a:pPr>
-            <a:r>
-              <a:rPr lang="en-US" sz="950" b="1" dirty="0"/>
+          </a:p>
+          <a:p>
+            <a:pPr marL="0" indent="0">
+              <a:buNone/>
+            </a:pPr>
+            <a:r>
+              <a:rPr lang="en-US" sz="900" b="1" dirty="0"/>
               <a:t>소셜미디어·광고</a:t>
             </a:r>
             <a:r>
-              <a:rPr lang="en-US" sz="930" dirty="0"/>
+              <a:rPr lang="en-US" sz="900" dirty="0"/>
               <a:t> — AI 소셜 시장 2034년 $540억 전망, 연평균</a:t>
             </a:r>
-            <a:endParaRPr lang="en-US" sz="950" dirty="0"/>
           </a:p>
           <a:p>
             <a:pPr marL="0" indent="0">
@@ -10227,10 +10215,9 @@
               <a:buNone/>
             </a:pPr>
             <a:r>
-              <a:rPr lang="en-US" sz="930" dirty="0"/>
+              <a:rPr lang="en-US" sz="900" dirty="0"/>
               <a:t>36.3% 성장 (ElectroIQ/SNS Insider, 2025). 마케터의 54%가</a:t>
             </a:r>
-            <a:endParaRPr lang="en-US" sz="950" dirty="0"/>
           </a:p>
           <a:p>
             <a:pPr marL="0" indent="0">
@@ -10240,34 +10227,31 @@
               <a:buNone/>
             </a:pPr>
             <a:r>
-              <a:rPr lang="en-US" sz="820" dirty="0"/>
+              <a:rPr lang="en-US" sz="900" dirty="0"/>
               <a:t>ChatGPT 등 AI 플랫폼 광고 투자 확대 계획 (Mediaocean, 2025.11)</a:t>
             </a:r>
-            <a:endParaRPr lang="en-US" sz="950" dirty="0"/>
-          </a:p>
-          <a:p>
-            <a:pPr marL="0" indent="0">
-              <a:buNone/>
-            </a:pPr>
-            <a:r>
-              <a:rPr lang="en-US" sz="950" b="1" dirty="0"/>
+          </a:p>
+          <a:p>
+            <a:pPr marL="0" indent="0">
+              <a:buNone/>
+            </a:pPr>
+            <a:r>
+              <a:rPr lang="en-US" sz="900" b="1" dirty="0"/>
               <a:t>영상·방송</a:t>
             </a:r>
             <a:r>
-              <a:rPr lang="en-US" sz="930" dirty="0"/>
+              <a:rPr lang="en-US" sz="900" dirty="0"/>
               <a:t> — Sora·Runway·Veo로 텍스트만으로 영상을 생성하는</a:t>
             </a:r>
-            <a:endParaRPr lang="en-US" sz="950" dirty="0"/>
-          </a:p>
-          <a:p>
-            <a:pPr marL="0" indent="0">
-              <a:buNone/>
-            </a:pPr>
-            <a:r>
-              <a:rPr lang="en-US" sz="820" dirty="0"/>
+          </a:p>
+          <a:p>
+            <a:pPr marL="0" indent="0">
+              <a:buNone/>
+            </a:pPr>
+            <a:r>
+              <a:rPr lang="en-US" sz="900" dirty="0"/>
               <a:t>시대 개막. Channel 4(UK) AI 앵커 'Arti' 도입 (Reuters, 2025.10)</a:t>
             </a:r>
-            <a:endParaRPr lang="en-US" sz="950" dirty="0"/>
           </a:p>
         </p:txBody>
       </p:sp>
